--- a/Slides/sugestaoslideludes.pptx
+++ b/Slides/sugestaoslideludes.pptx
@@ -21,16 +21,9 @@
   <p:notesSz cx="6858000" cy="9144000"/>
   <p:embeddedFontLst>
     <p:embeddedFont>
-      <p:font typeface="Calibri" panose="020F0502020204030204" pitchFamily="34" charset="0"/>
+      <p:font typeface="Tahoma" panose="020B0604030504040204" pitchFamily="34" charset="0"/>
       <p:regular r:id="rId11"/>
       <p:bold r:id="rId12"/>
-      <p:italic r:id="rId13"/>
-      <p:boldItalic r:id="rId14"/>
-    </p:embeddedFont>
-    <p:embeddedFont>
-      <p:font typeface="Tahoma" panose="020B0604030504040204" pitchFamily="34" charset="0"/>
-      <p:regular r:id="rId15"/>
-      <p:bold r:id="rId16"/>
     </p:embeddedFont>
   </p:embeddedFontLst>
   <p:defaultTextStyle>
@@ -186,6 +179,9 @@
     <p:ext uri="{EFAFB233-063F-42B5-8137-9DF3F51BA10A}">
       <p15:sldGuideLst xmlns:p15="http://schemas.microsoft.com/office/powerpoint/2012/main"/>
     </p:ext>
+    <p:ext uri="{2D200454-40CA-4A62-9FC3-DE9A4176ACB9}">
+      <p15:notesGuideLst xmlns:p15="http://schemas.microsoft.com/office/powerpoint/2012/main"/>
+    </p:ext>
   </p:extLst>
 </p:presentation>
 </file>
@@ -272,7 +268,7 @@
           <a:p>
             <a:fld id="{9788BEF5-D634-4783-BB1D-B313F140711D}" type="datetimeFigureOut">
               <a:rPr lang="pt-BR" smtClean="0"/>
-              <a:t>17/06/2021</a:t>
+              <a:t>07/05/2026</a:t>
             </a:fld>
             <a:endParaRPr lang="pt-BR"/>
           </a:p>
@@ -573,6 +569,72 @@
       </p:grpSpPr>
       <p:sp>
         <p:nvSpPr>
+          <p:cNvPr id="4" name="Rectangle 3">
+            <a:extLst>
+              <a:ext uri="{FF2B5EF4-FFF2-40B4-BE49-F238E27FC236}">
+                <a16:creationId xmlns:a16="http://schemas.microsoft.com/office/drawing/2014/main" id="{6F8D1F88-DDF1-DB72-77D4-CD755EC4307A}"/>
+              </a:ext>
+            </a:extLst>
+          </p:cNvPr>
+          <p:cNvSpPr/>
+          <p:nvPr userDrawn="1"/>
+        </p:nvSpPr>
+        <p:spPr>
+          <a:xfrm>
+            <a:off x="0" y="5850761"/>
+            <a:ext cx="12192000" cy="1007239"/>
+          </a:xfrm>
+          <a:prstGeom prst="rect">
+            <a:avLst/>
+          </a:prstGeom>
+          <a:solidFill>
+            <a:schemeClr val="bg1"/>
+          </a:solidFill>
+          <a:ln>
+            <a:noFill/>
+          </a:ln>
+        </p:spPr>
+        <p:style>
+          <a:lnRef idx="1">
+            <a:schemeClr val="accent6"/>
+          </a:lnRef>
+          <a:fillRef idx="3">
+            <a:schemeClr val="accent6"/>
+          </a:fillRef>
+          <a:effectRef idx="2">
+            <a:schemeClr val="accent6"/>
+          </a:effectRef>
+          <a:fontRef idx="minor">
+            <a:schemeClr val="lt1"/>
+          </a:fontRef>
+        </p:style>
+        <p:txBody>
+          <a:bodyPr wrap="square" rtlCol="0" anchor="ctr">
+            <a:spAutoFit/>
+          </a:bodyPr>
+          <a:lstStyle/>
+          <a:p>
+            <a:pPr algn="ctr"/>
+            <a:endParaRPr lang="pt-BR" sz="2400" b="1" dirty="0">
+              <a:ln w="0"/>
+              <a:solidFill>
+                <a:schemeClr val="bg1"/>
+              </a:solidFill>
+              <a:effectLst>
+                <a:outerShdw blurRad="38100" dist="19050" dir="2700000" algn="tl" rotWithShape="0">
+                  <a:schemeClr val="dk1">
+                    <a:alpha val="40000"/>
+                  </a:schemeClr>
+                </a:outerShdw>
+              </a:effectLst>
+              <a:latin typeface="Arial" panose="020B0604020202020204" pitchFamily="34" charset="0"/>
+              <a:cs typeface="Arial" panose="020B0604020202020204" pitchFamily="34" charset="0"/>
+            </a:endParaRPr>
+          </a:p>
+        </p:txBody>
+      </p:sp>
+      <p:sp>
+        <p:nvSpPr>
           <p:cNvPr id="13" name="Espaço Reservado para Texto 11"/>
           <p:cNvSpPr>
             <a:spLocks noGrp="1"/>
@@ -657,78 +719,6 @@
       </p:sp>
       <p:pic>
         <p:nvPicPr>
-          <p:cNvPr id="3" name="Picture 2" descr="A close up of a logo&#10;&#10;Description automatically generated">
-            <a:extLst>
-              <a:ext uri="{FF2B5EF4-FFF2-40B4-BE49-F238E27FC236}">
-                <a16:creationId xmlns:a16="http://schemas.microsoft.com/office/drawing/2014/main" id="{798301F2-6F6C-46A6-813A-880DED726DC6}"/>
-              </a:ext>
-            </a:extLst>
-          </p:cNvPr>
-          <p:cNvPicPr>
-            <a:picLocks noChangeAspect="1"/>
-          </p:cNvPicPr>
-          <p:nvPr/>
-        </p:nvPicPr>
-        <p:blipFill>
-          <a:blip r:embed="rId3" cstate="print">
-            <a:extLst>
-              <a:ext uri="{28A0092B-C50C-407E-A947-70E740481C1C}">
-                <a14:useLocalDpi xmlns:a14="http://schemas.microsoft.com/office/drawing/2010/main" val="0"/>
-              </a:ext>
-            </a:extLst>
-          </a:blip>
-          <a:stretch>
-            <a:fillRect/>
-          </a:stretch>
-        </p:blipFill>
-        <p:spPr>
-          <a:xfrm>
-            <a:off x="9748671" y="6071431"/>
-            <a:ext cx="2028871" cy="612000"/>
-          </a:xfrm>
-          <a:prstGeom prst="rect">
-            <a:avLst/>
-          </a:prstGeom>
-        </p:spPr>
-      </p:pic>
-      <p:pic>
-        <p:nvPicPr>
-          <p:cNvPr id="12" name="Picture 11" descr="A close up of a logo&#10;&#10;Description automatically generated">
-            <a:extLst>
-              <a:ext uri="{FF2B5EF4-FFF2-40B4-BE49-F238E27FC236}">
-                <a16:creationId xmlns:a16="http://schemas.microsoft.com/office/drawing/2014/main" id="{2947647A-A101-4FE1-89F8-F7450981FA1C}"/>
-              </a:ext>
-            </a:extLst>
-          </p:cNvPr>
-          <p:cNvPicPr>
-            <a:picLocks noChangeAspect="1"/>
-          </p:cNvPicPr>
-          <p:nvPr/>
-        </p:nvPicPr>
-        <p:blipFill>
-          <a:blip r:embed="rId4" cstate="print">
-            <a:extLst>
-              <a:ext uri="{28A0092B-C50C-407E-A947-70E740481C1C}">
-                <a14:useLocalDpi xmlns:a14="http://schemas.microsoft.com/office/drawing/2010/main" val="0"/>
-              </a:ext>
-            </a:extLst>
-          </a:blip>
-          <a:stretch>
-            <a:fillRect/>
-          </a:stretch>
-        </p:blipFill>
-        <p:spPr>
-          <a:xfrm>
-            <a:off x="7302056" y="6071431"/>
-            <a:ext cx="1866296" cy="612000"/>
-          </a:xfrm>
-          <a:prstGeom prst="rect">
-            <a:avLst/>
-          </a:prstGeom>
-        </p:spPr>
-      </p:pic>
-      <p:pic>
-        <p:nvPicPr>
           <p:cNvPr id="16" name="Picture 15" descr="A picture containing drawing&#10;&#10;Description automatically generated">
             <a:extLst>
               <a:ext uri="{FF2B5EF4-FFF2-40B4-BE49-F238E27FC236}">
@@ -742,7 +732,17 @@
           <p:nvPr/>
         </p:nvPicPr>
         <p:blipFill>
-          <a:blip r:embed="rId5" cstate="print">
+          <a:blip r:embed="rId3" cstate="print">
+            <a:clrChange>
+              <a:clrFrom>
+                <a:srgbClr val="FFFFFF"/>
+              </a:clrFrom>
+              <a:clrTo>
+                <a:srgbClr val="FFFFFF">
+                  <a:alpha val="0"/>
+                </a:srgbClr>
+              </a:clrTo>
+            </a:clrChange>
             <a:extLst>
               <a:ext uri="{28A0092B-C50C-407E-A947-70E740481C1C}">
                 <a14:useLocalDpi xmlns:a14="http://schemas.microsoft.com/office/drawing/2010/main" val="0"/>
@@ -778,7 +778,7 @@
           <p:nvPr/>
         </p:nvPicPr>
         <p:blipFill>
-          <a:blip r:embed="rId6">
+          <a:blip r:embed="rId4">
             <a:clrChange>
               <a:clrFrom>
                 <a:srgbClr val="FFFFFF"/>
@@ -824,7 +824,7 @@
           <p:nvPr/>
         </p:nvPicPr>
         <p:blipFill>
-          <a:blip r:embed="rId7">
+          <a:blip r:embed="rId5">
             <a:extLst>
               <a:ext uri="{28A0092B-C50C-407E-A947-70E740481C1C}">
                 <a14:useLocalDpi xmlns:a14="http://schemas.microsoft.com/office/drawing/2010/main" val="0"/>
@@ -837,7 +837,7 @@
         </p:blipFill>
         <p:spPr>
           <a:xfrm>
-            <a:off x="3078685" y="5820731"/>
+            <a:off x="5976662" y="5905713"/>
             <a:ext cx="634630" cy="862700"/>
           </a:xfrm>
           <a:prstGeom prst="rect">
@@ -860,7 +860,19 @@
           <p:nvPr/>
         </p:nvPicPr>
         <p:blipFill>
-          <a:blip r:embed="rId8">
+          <a:blip r:embed="rId6">
+            <a:clrChange>
+              <a:clrFrom>
+                <a:srgbClr val="000000">
+                  <a:alpha val="0"/>
+                </a:srgbClr>
+              </a:clrFrom>
+              <a:clrTo>
+                <a:srgbClr val="000000">
+                  <a:alpha val="0"/>
+                </a:srgbClr>
+              </a:clrTo>
+            </a:clrChange>
             <a:extLst>
               <a:ext uri="{28A0092B-C50C-407E-A947-70E740481C1C}">
                 <a14:useLocalDpi xmlns:a14="http://schemas.microsoft.com/office/drawing/2010/main" val="0"/>
@@ -873,7 +885,7 @@
         </p:blipFill>
         <p:spPr>
           <a:xfrm>
-            <a:off x="5284727" y="5514294"/>
+            <a:off x="10405646" y="5682303"/>
             <a:ext cx="1173796" cy="1343706"/>
           </a:xfrm>
           <a:prstGeom prst="rect">
